--- a/assets/pptx/catalog-673.pptx
+++ b/assets/pptx/catalog-673.pptx
@@ -3382,7 +3382,7 @@
                 <a:ea typeface="Ebrima"/>
                 <a:cs typeface="Ebrima"/>
               </a:rPr>
-              <a:t>ጭራሽ ልክ የለው ኦሆሆሆሆ ጭራሽ ልክ የለው(2x)</a:t>
+              <a:t>ጭራሽ ልክ የለው ኦሆሆሆሆ ጭራሽ ልክ የለው2x</a:t>
             </a:r>
           </a:p>
         </p:txBody>
@@ -3503,7 +3503,7 @@
                 <a:ea typeface="Ebrima"/>
                 <a:cs typeface="Ebrima"/>
               </a:rPr>
-              <a:t>የአምላኬ ፍቅር ልዩ ነው (2x)</a:t>
+              <a:t>የአምላኬ ፍቅር ልዩ ነው 2x</a:t>
             </a:r>
           </a:p>
           <a:p>
@@ -3521,7 +3521,7 @@
                 <a:ea typeface="Ebrima"/>
                 <a:cs typeface="Ebrima"/>
               </a:rPr>
-              <a:t>አቤት የፍቅሩ ጥልቀት (4x)</a:t>
+              <a:t>አቤት የፍቅሩ ጥልቀት 4x</a:t>
             </a:r>
           </a:p>
           <a:p>
@@ -3557,7 +3557,7 @@
                 <a:ea typeface="Ebrima"/>
                 <a:cs typeface="Ebrima"/>
               </a:rPr>
-              <a:t>አያልቅበት (4x)</a:t>
+              <a:t>አያልቅበት 4x</a:t>
             </a:r>
           </a:p>
         </p:txBody>
